--- a/attached_assets/pitch-deck-slides/dime-time-pitch-deck.pptx
+++ b/attached_assets/pitch-deck-slides/dime-time-pitch-deck.pptx
@@ -17,7 +17,6 @@
     <p:sldId id="265" r:id="rId16"/>
     <p:sldId id="266" r:id="rId17"/>
     <p:sldId id="267" r:id="rId18"/>
-    <p:sldId id="268" r:id="rId19"/>
   </p:sldIdLst>
   <p:sldSz cx="12191695" cy="6858000" type="screen4x3"/>
   <p:notesSz cx="6858000" cy="9144000"/>
@@ -3217,48 +3216,6 @@
 </file>
 
 <file path=ppt/slides/slide12.xml><?xml version="1.0" encoding="utf-8"?>
-<p:sld xmlns:a="http://schemas.openxmlformats.org/drawingml/2006/main" xmlns:p="http://schemas.openxmlformats.org/presentationml/2006/main" xmlns:r="http://schemas.openxmlformats.org/officeDocument/2006/relationships">
-  <p:cSld>
-    <p:spTree>
-      <p:nvGrpSpPr>
-        <p:cNvPr id="1" name=""/>
-        <p:cNvGrpSpPr/>
-        <p:nvPr/>
-      </p:nvGrpSpPr>
-      <p:grpSpPr/>
-      <p:pic>
-        <p:nvPicPr>
-          <p:cNvPr id="2" name="Picture 1" descr="slide-12-ask.png"/>
-          <p:cNvPicPr>
-            <a:picLocks noChangeAspect="1"/>
-          </p:cNvPicPr>
-          <p:nvPr/>
-        </p:nvPicPr>
-        <p:blipFill>
-          <a:blip r:embed="rId2"/>
-          <a:stretch>
-            <a:fillRect/>
-          </a:stretch>
-        </p:blipFill>
-        <p:spPr>
-          <a:xfrm>
-            <a:off x="0" y="0"/>
-            <a:ext cx="12191695" cy="6858000"/>
-          </a:xfrm>
-          <a:prstGeom prst="rect">
-            <a:avLst/>
-          </a:prstGeom>
-        </p:spPr>
-      </p:pic>
-    </p:spTree>
-  </p:cSld>
-  <p:clrMapOvr>
-    <a:masterClrMapping/>
-  </p:clrMapOvr>
-</p:sld>
-</file>
-
-<file path=ppt/slides/slide13.xml><?xml version="1.0" encoding="utf-8"?>
 <p:sld xmlns:a="http://schemas.openxmlformats.org/drawingml/2006/main" xmlns:p="http://schemas.openxmlformats.org/presentationml/2006/main" xmlns:r="http://schemas.openxmlformats.org/officeDocument/2006/relationships">
   <p:cSld>
     <p:spTree>

--- a/attached_assets/pitch-deck-slides/dime-time-pitch-deck.pptx
+++ b/attached_assets/pitch-deck-slides/dime-time-pitch-deck.pptx
@@ -3365,6 +3365,44 @@
           </a:p>
         </p:txBody>
       </p:sp>
+      <p:sp>
+        <p:nvSpPr>
+          <p:cNvPr id="9" name="TextBox 8"/>
+          <p:cNvSpPr txBox="1"/>
+          <p:nvPr/>
+        </p:nvSpPr>
+        <p:spPr>
+          <a:xfrm>
+            <a:off x="10607040" y="6355080"/>
+            <a:ext cx="1188720" cy="320040"/>
+          </a:xfrm>
+          <a:prstGeom prst="rect">
+            <a:avLst/>
+          </a:prstGeom>
+          <a:noFill/>
+        </p:spPr>
+        <p:txBody>
+          <a:bodyPr wrap="square">
+            <a:spAutoFit/>
+          </a:bodyPr>
+          <a:lstStyle/>
+          <a:p>
+            <a:pPr algn="r">
+              <a:spcAft>
+                <a:spcPts val="0"/>
+              </a:spcAft>
+            </a:pPr>
+            <a:r>
+              <a:rPr sz="1100" b="0">
+                <a:solidFill>
+                  <a:srgbClr val="E9E8FD"/>
+                </a:solidFill>
+              </a:rPr>
+              <a:t>01 / 14</a:t>
+            </a:r>
+          </a:p>
+        </p:txBody>
+      </p:sp>
     </p:spTree>
   </p:cSld>
   <p:clrMapOvr>
@@ -4018,7 +4056,7 @@
         </p:nvSpPr>
         <p:spPr>
           <a:xfrm>
-            <a:off x="1097280" y="6126480"/>
+            <a:off x="1097280" y="6108192"/>
             <a:ext cx="9966960" cy="320040"/>
           </a:xfrm>
           <a:prstGeom prst="rect">
@@ -4038,9 +4076,9 @@
               </a:spcAft>
             </a:pPr>
             <a:r>
-              <a:rPr sz="1050" b="0">
-                <a:solidFill>
-                  <a:srgbClr val="9B98C4"/>
+              <a:rPr sz="1150" b="0">
+                <a:solidFill>
+                  <a:srgbClr val="C9C7F9"/>
                 </a:solidFill>
               </a:rPr>
               <a:t>No paid-spend assumptions — channels are validated before scaling. All growth figures will be reported, not projected.</a:t>
@@ -5269,7 +5307,7 @@
         </p:nvSpPr>
         <p:spPr>
           <a:xfrm>
-            <a:off x="1828800" y="6080760"/>
+            <a:off x="1828800" y="6062472"/>
             <a:ext cx="8503920" cy="320040"/>
           </a:xfrm>
           <a:prstGeom prst="rect">
@@ -5289,9 +5327,9 @@
               </a:spcAft>
             </a:pPr>
             <a:r>
-              <a:rPr sz="1000" b="0">
-                <a:solidFill>
-                  <a:srgbClr val="9B98C4"/>
+              <a:rPr sz="1150" b="0">
+                <a:solidFill>
+                  <a:srgbClr val="C9C7F9"/>
                 </a:solidFill>
               </a:rPr>
               <a:t>No user metrics are reported until public launch — nothing on this slide is estimated.</a:t>
@@ -5825,7 +5863,7 @@
                   <a:srgbClr val="FFFFFF"/>
                 </a:solidFill>
               </a:rPr>
-              <a:t>•  MBA — Management Information Systems</a:t>
+              <a:t>•  MBA • Graduate degree in Management Information Systems</a:t>
             </a:r>
           </a:p>
           <a:p>
@@ -5855,7 +5893,7 @@
                   <a:srgbClr val="FFFFFF"/>
                 </a:solidFill>
               </a:rPr>
-              <a:t>•  Integrated Plaid, Stripe ACH and Mercury (Coinbase planned)</a:t>
+              <a:t>•  Built with Plaid and Stripe ACH; payout rails verified through Mercury</a:t>
             </a:r>
           </a:p>
         </p:txBody>
@@ -6606,27 +6644,27 @@
         </p:nvSpPr>
         <p:spPr>
           <a:xfrm>
-            <a:off x="5029200" y="2468879"/>
-            <a:ext cx="2743200" cy="365760"/>
-          </a:xfrm>
-          <a:prstGeom prst="rect">
-            <a:avLst/>
-          </a:prstGeom>
-          <a:noFill/>
-        </p:spPr>
-        <p:txBody>
-          <a:bodyPr wrap="square">
-            <a:spAutoFit/>
-          </a:bodyPr>
-          <a:lstStyle/>
-          <a:p>
-            <a:pPr algn="l">
-              <a:spcAft>
-                <a:spcPts val="0"/>
-              </a:spcAft>
-            </a:pPr>
-            <a:r>
-              <a:rPr sz="1100" b="0">
+            <a:off x="5029200" y="2496312"/>
+            <a:ext cx="3063240" cy="365760"/>
+          </a:xfrm>
+          <a:prstGeom prst="rect">
+            <a:avLst/>
+          </a:prstGeom>
+          <a:noFill/>
+        </p:spPr>
+        <p:txBody>
+          <a:bodyPr wrap="square">
+            <a:spAutoFit/>
+          </a:bodyPr>
+          <a:lstStyle/>
+          <a:p>
+            <a:pPr algn="l">
+              <a:spcAft>
+                <a:spcPts val="0"/>
+              </a:spcAft>
+            </a:pPr>
+            <a:r>
+              <a:rPr sz="1050" b="0">
                 <a:solidFill>
                   <a:srgbClr val="FFFFFF"/>
                 </a:solidFill>
@@ -6774,32 +6812,32 @@
         </p:nvSpPr>
         <p:spPr>
           <a:xfrm>
-            <a:off x="5029200" y="3364991"/>
-            <a:ext cx="2743200" cy="365760"/>
-          </a:xfrm>
-          <a:prstGeom prst="rect">
-            <a:avLst/>
-          </a:prstGeom>
-          <a:noFill/>
-        </p:spPr>
-        <p:txBody>
-          <a:bodyPr wrap="square">
-            <a:spAutoFit/>
-          </a:bodyPr>
-          <a:lstStyle/>
-          <a:p>
-            <a:pPr algn="l">
-              <a:spcAft>
-                <a:spcPts val="0"/>
-              </a:spcAft>
-            </a:pPr>
-            <a:r>
-              <a:rPr sz="1100" b="0">
-                <a:solidFill>
-                  <a:srgbClr val="FFFFFF"/>
-                </a:solidFill>
-              </a:rPr>
-              <a:t>Founder runway</a:t>
+            <a:off x="5029200" y="3392424"/>
+            <a:ext cx="3063240" cy="365760"/>
+          </a:xfrm>
+          <a:prstGeom prst="rect">
+            <a:avLst/>
+          </a:prstGeom>
+          <a:noFill/>
+        </p:spPr>
+        <p:txBody>
+          <a:bodyPr wrap="square">
+            <a:spAutoFit/>
+          </a:bodyPr>
+          <a:lstStyle/>
+          <a:p>
+            <a:pPr algn="l">
+              <a:spcAft>
+                <a:spcPts val="0"/>
+              </a:spcAft>
+            </a:pPr>
+            <a:r>
+              <a:rPr sz="1050" b="0">
+                <a:solidFill>
+                  <a:srgbClr val="FFFFFF"/>
+                </a:solidFill>
+              </a:rPr>
+              <a:t>Founder compensation &amp; operating runway</a:t>
             </a:r>
           </a:p>
         </p:txBody>
@@ -6942,27 +6980,27 @@
         </p:nvSpPr>
         <p:spPr>
           <a:xfrm>
-            <a:off x="5029200" y="4261103"/>
-            <a:ext cx="2743200" cy="365760"/>
-          </a:xfrm>
-          <a:prstGeom prst="rect">
-            <a:avLst/>
-          </a:prstGeom>
-          <a:noFill/>
-        </p:spPr>
-        <p:txBody>
-          <a:bodyPr wrap="square">
-            <a:spAutoFit/>
-          </a:bodyPr>
-          <a:lstStyle/>
-          <a:p>
-            <a:pPr algn="l">
-              <a:spcAft>
-                <a:spcPts val="0"/>
-              </a:spcAft>
-            </a:pPr>
-            <a:r>
-              <a:rPr sz="1100" b="0">
+            <a:off x="5029200" y="4288536"/>
+            <a:ext cx="3063240" cy="365760"/>
+          </a:xfrm>
+          <a:prstGeom prst="rect">
+            <a:avLst/>
+          </a:prstGeom>
+          <a:noFill/>
+        </p:spPr>
+        <p:txBody>
+          <a:bodyPr wrap="square">
+            <a:spAutoFit/>
+          </a:bodyPr>
+          <a:lstStyle/>
+          <a:p>
+            <a:pPr algn="l">
+              <a:spcAft>
+                <a:spcPts val="0"/>
+              </a:spcAft>
+            </a:pPr>
+            <a:r>
+              <a:rPr sz="1050" b="0">
                 <a:solidFill>
                   <a:srgbClr val="FFFFFF"/>
                 </a:solidFill>
@@ -7110,27 +7148,27 @@
         </p:nvSpPr>
         <p:spPr>
           <a:xfrm>
-            <a:off x="5029200" y="5157216"/>
-            <a:ext cx="2743200" cy="365760"/>
-          </a:xfrm>
-          <a:prstGeom prst="rect">
-            <a:avLst/>
-          </a:prstGeom>
-          <a:noFill/>
-        </p:spPr>
-        <p:txBody>
-          <a:bodyPr wrap="square">
-            <a:spAutoFit/>
-          </a:bodyPr>
-          <a:lstStyle/>
-          <a:p>
-            <a:pPr algn="l">
-              <a:spcAft>
-                <a:spcPts val="0"/>
-              </a:spcAft>
-            </a:pPr>
-            <a:r>
-              <a:rPr sz="1100" b="0">
+            <a:off x="5029200" y="5184648"/>
+            <a:ext cx="3063240" cy="365760"/>
+          </a:xfrm>
+          <a:prstGeom prst="rect">
+            <a:avLst/>
+          </a:prstGeom>
+          <a:noFill/>
+        </p:spPr>
+        <p:txBody>
+          <a:bodyPr wrap="square">
+            <a:spAutoFit/>
+          </a:bodyPr>
+          <a:lstStyle/>
+          <a:p>
+            <a:pPr algn="l">
+              <a:spcAft>
+                <a:spcPts val="0"/>
+              </a:spcAft>
+            </a:pPr>
+            <a:r>
+              <a:rPr sz="1050" b="0">
                 <a:solidFill>
                   <a:srgbClr val="FFFFFF"/>
                 </a:solidFill>
@@ -8813,7 +8851,7 @@
         </p:nvSpPr>
         <p:spPr>
           <a:xfrm>
-            <a:off x="658368" y="5943600"/>
+            <a:off x="658368" y="5897880"/>
             <a:ext cx="10881360" cy="320040"/>
           </a:xfrm>
           <a:prstGeom prst="rect">
@@ -8833,9 +8871,9 @@
               </a:spcAft>
             </a:pPr>
             <a:r>
-              <a:rPr sz="900" b="0">
-                <a:solidFill>
-                  <a:srgbClr val="9B98C4"/>
+              <a:rPr sz="1050" b="0">
+                <a:solidFill>
+                  <a:srgbClr val="C9C7F9"/>
                 </a:solidFill>
               </a:rPr>
               <a:t>Sources: Federal Reserve Bank of New York, Household Debt &amp; Credit Report Q1 2026 (released May 2026) · Pew Research Center, Mobile Fact Sheet (2025)</a:t>
@@ -9212,9 +9250,9 @@
               </a:spcAft>
             </a:pPr>
             <a:r>
-              <a:rPr sz="1200" b="0">
-                <a:solidFill>
-                  <a:srgbClr val="E9E8FD"/>
+              <a:rPr sz="1300" b="0">
+                <a:solidFill>
+                  <a:srgbClr val="FFFFFF"/>
                 </a:solidFill>
               </a:rPr>
               <a:t>Round-ups are batched and transferred on a schedule the user approves — money does not move on every individual purchase.</a:t>
@@ -9810,7 +9848,7 @@
         <p:spPr>
           <a:xfrm>
             <a:off x="6675120" y="2990088"/>
-            <a:ext cx="1554480" cy="310896"/>
+            <a:ext cx="4206240" cy="310896"/>
           </a:xfrm>
           <a:prstGeom prst="roundRect">
             <a:avLst>
@@ -9850,7 +9888,7 @@
                   <a:srgbClr val="FFFFFF"/>
                 </a:solidFill>
               </a:rPr>
-              <a:t>L I V E     I N     A P P</a:t>
+              <a:t>P R O V E N     I N     C O N T R O L L E D     L I V E     T E S T</a:t>
             </a:r>
           </a:p>
         </p:txBody>
@@ -11175,29 +11213,29 @@
         </p:nvSpPr>
         <p:spPr>
           <a:xfrm>
-            <a:off x="960120" y="5029200"/>
-            <a:ext cx="3703320" cy="457200"/>
-          </a:xfrm>
-          <a:prstGeom prst="rect">
-            <a:avLst/>
-          </a:prstGeom>
-          <a:noFill/>
-        </p:spPr>
-        <p:txBody>
-          <a:bodyPr wrap="square">
-            <a:spAutoFit/>
-          </a:bodyPr>
-          <a:lstStyle/>
-          <a:p>
-            <a:pPr algn="l">
-              <a:spcAft>
-                <a:spcPts val="0"/>
-              </a:spcAft>
-            </a:pPr>
-            <a:r>
-              <a:rPr sz="1050" b="0">
-                <a:solidFill>
-                  <a:srgbClr val="E9E8FD"/>
+            <a:off x="960120" y="4983480"/>
+            <a:ext cx="3703320" cy="502920"/>
+          </a:xfrm>
+          <a:prstGeom prst="rect">
+            <a:avLst/>
+          </a:prstGeom>
+          <a:noFill/>
+        </p:spPr>
+        <p:txBody>
+          <a:bodyPr wrap="square">
+            <a:spAutoFit/>
+          </a:bodyPr>
+          <a:lstStyle/>
+          <a:p>
+            <a:pPr algn="l">
+              <a:spcAft>
+                <a:spcPts val="0"/>
+              </a:spcAft>
+            </a:pPr>
+            <a:r>
+              <a:rPr sz="1150" b="0">
+                <a:solidFill>
+                  <a:srgbClr val="FFFFFF"/>
                 </a:solidFill>
               </a:rPr>
               <a:t>Context for the size of the problem — not our revenue model.</a:t>
@@ -11745,47 +11783,47 @@
               </a:spcAft>
             </a:pPr>
             <a:r>
+              <a:rPr sz="1100" b="0">
+                <a:solidFill>
+                  <a:srgbClr val="FFFFFF"/>
+                </a:solidFill>
+              </a:rPr>
+              <a:t>Subscriber counts are illustrative milestones — targets, not forecasts. ARR = subscribers × $2.99 × 12.</a:t>
+            </a:r>
+          </a:p>
+        </p:txBody>
+      </p:sp>
+      <p:sp>
+        <p:nvSpPr>
+          <p:cNvPr id="23" name="TextBox 22"/>
+          <p:cNvSpPr txBox="1"/>
+          <p:nvPr/>
+        </p:nvSpPr>
+        <p:spPr>
+          <a:xfrm>
+            <a:off x="658368" y="5897880"/>
+            <a:ext cx="10881360" cy="320040"/>
+          </a:xfrm>
+          <a:prstGeom prst="rect">
+            <a:avLst/>
+          </a:prstGeom>
+          <a:noFill/>
+        </p:spPr>
+        <p:txBody>
+          <a:bodyPr wrap="square">
+            <a:spAutoFit/>
+          </a:bodyPr>
+          <a:lstStyle/>
+          <a:p>
+            <a:pPr algn="l">
+              <a:spcAft>
+                <a:spcPts val="0"/>
+              </a:spcAft>
+            </a:pPr>
+            <a:r>
               <a:rPr sz="1050" b="0">
                 <a:solidFill>
-                  <a:srgbClr val="E9E8FD"/>
-                </a:solidFill>
-              </a:rPr>
-              <a:t>Subscriber counts are illustrative milestones — targets, not forecasts. ARR = subscribers × $2.99 × 12.</a:t>
-            </a:r>
-          </a:p>
-        </p:txBody>
-      </p:sp>
-      <p:sp>
-        <p:nvSpPr>
-          <p:cNvPr id="23" name="TextBox 22"/>
-          <p:cNvSpPr txBox="1"/>
-          <p:nvPr/>
-        </p:nvSpPr>
-        <p:spPr>
-          <a:xfrm>
-            <a:off x="658368" y="5943600"/>
-            <a:ext cx="10881360" cy="320040"/>
-          </a:xfrm>
-          <a:prstGeom prst="rect">
-            <a:avLst/>
-          </a:prstGeom>
-          <a:noFill/>
-        </p:spPr>
-        <p:txBody>
-          <a:bodyPr wrap="square">
-            <a:spAutoFit/>
-          </a:bodyPr>
-          <a:lstStyle/>
-          <a:p>
-            <a:pPr algn="l">
-              <a:spcAft>
-                <a:spcPts val="0"/>
-              </a:spcAft>
-            </a:pPr>
-            <a:r>
-              <a:rPr sz="900" b="0">
-                <a:solidFill>
-                  <a:srgbClr val="E9E8FD"/>
+                  <a:srgbClr val="FFFFFF"/>
                 </a:solidFill>
               </a:rPr>
               <a:t>Source: Federal Reserve Bank of New York, Household Debt &amp; Credit Report Q1 2026 (released May 2026)</a:t>
@@ -15109,7 +15147,7 @@
         <p:spPr>
           <a:xfrm>
             <a:off x="6858000" y="2057400"/>
-            <a:ext cx="4709160" cy="3886200"/>
+            <a:ext cx="4709160" cy="3429000"/>
           </a:xfrm>
           <a:prstGeom prst="roundRect">
             <a:avLst/>
@@ -15190,8 +15228,8 @@
         </p:nvSpPr>
         <p:spPr>
           <a:xfrm>
-            <a:off x="7114032" y="2743200"/>
-            <a:ext cx="4206240" cy="713232"/>
+            <a:off x="7114032" y="2788920"/>
+            <a:ext cx="4206240" cy="804672"/>
           </a:xfrm>
           <a:prstGeom prst="roundRect">
             <a:avLst/>
@@ -15224,7 +15262,7 @@
           <a:p>
             <a:pPr algn="l"/>
             <a:r>
-              <a:rPr sz="1500" b="1">
+              <a:rPr sz="1600" b="1">
                 <a:solidFill>
                   <a:srgbClr val="FFFFFF"/>
                 </a:solidFill>
@@ -15235,7 +15273,7 @@
           <a:p>
             <a:pPr algn="l"/>
             <a:r>
-              <a:rPr sz="1000">
+              <a:rPr sz="1100">
                 <a:solidFill>
                   <a:srgbClr val="FFFFFF"/>
                 </a:solidFill>
@@ -15253,8 +15291,8 @@
         </p:nvSpPr>
         <p:spPr>
           <a:xfrm>
-            <a:off x="7114032" y="3538728"/>
-            <a:ext cx="4206240" cy="713232"/>
+            <a:off x="7114032" y="3703320"/>
+            <a:ext cx="4206240" cy="804672"/>
           </a:xfrm>
           <a:prstGeom prst="roundRect">
             <a:avLst/>
@@ -15287,7 +15325,7 @@
           <a:p>
             <a:pPr algn="l"/>
             <a:r>
-              <a:rPr sz="1500" b="1">
+              <a:rPr sz="1600" b="1">
                 <a:solidFill>
                   <a:srgbClr val="FFFFFF"/>
                 </a:solidFill>
@@ -15298,7 +15336,7 @@
           <a:p>
             <a:pPr algn="l"/>
             <a:r>
-              <a:rPr sz="1000">
+              <a:rPr sz="1100">
                 <a:solidFill>
                   <a:srgbClr val="FFFFFF"/>
                 </a:solidFill>
@@ -15316,8 +15354,8 @@
         </p:nvSpPr>
         <p:spPr>
           <a:xfrm>
-            <a:off x="7114032" y="4334256"/>
-            <a:ext cx="4206240" cy="713232"/>
+            <a:off x="7114032" y="4617720"/>
+            <a:ext cx="4206240" cy="804672"/>
           </a:xfrm>
           <a:prstGeom prst="roundRect">
             <a:avLst/>
@@ -15350,7 +15388,7 @@
           <a:p>
             <a:pPr algn="l"/>
             <a:r>
-              <a:rPr sz="1500" b="1">
+              <a:rPr sz="1600" b="1">
                 <a:solidFill>
                   <a:srgbClr val="FFFFFF"/>
                 </a:solidFill>
@@ -15361,75 +15399,50 @@
           <a:p>
             <a:pPr algn="l"/>
             <a:r>
-              <a:rPr sz="1000">
-                <a:solidFill>
-                  <a:srgbClr val="FFFFFF"/>
-                </a:solidFill>
-              </a:rPr>
-              <a:t>Business banking &amp; treasury</a:t>
-            </a:r>
-          </a:p>
-        </p:txBody>
-      </p:sp>
-      <p:sp>
-        <p:nvSpPr>
-          <p:cNvPr id="11" name="Rounded Rectangle 10"/>
-          <p:cNvSpPr/>
-          <p:nvPr/>
-        </p:nvSpPr>
-        <p:spPr>
-          <a:xfrm>
-            <a:off x="7114032" y="5129784"/>
-            <a:ext cx="4206240" cy="713232"/>
-          </a:xfrm>
-          <a:prstGeom prst="roundRect">
-            <a:avLst/>
-          </a:prstGeom>
-          <a:solidFill>
-            <a:srgbClr val="A4A1F6"/>
-          </a:solidFill>
-          <a:ln>
-            <a:noFill/>
-          </a:ln>
-          <a:effectLst/>
-        </p:spPr>
-        <p:style>
-          <a:lnRef idx="1">
-            <a:schemeClr val="accent1"/>
-          </a:lnRef>
-          <a:fillRef idx="3">
-            <a:schemeClr val="accent1"/>
-          </a:fillRef>
-          <a:effectRef idx="2">
-            <a:schemeClr val="accent1"/>
-          </a:effectRef>
-          <a:fontRef idx="minor">
-            <a:schemeClr val="lt1"/>
-          </a:fontRef>
-        </p:style>
-        <p:txBody>
-          <a:bodyPr rtlCol="0" anchor="ctr" wrap="square" lIns="164592"/>
-          <a:lstStyle/>
-          <a:p>
-            <a:pPr algn="l"/>
-            <a:r>
-              <a:rPr sz="1500" b="1">
-                <a:solidFill>
-                  <a:srgbClr val="FFFFFF"/>
-                </a:solidFill>
-              </a:rPr>
-              <a:t>COINBASE</a:t>
-            </a:r>
-          </a:p>
-          <a:p>
-            <a:pPr algn="l"/>
-            <a:r>
-              <a:rPr sz="1000">
-                <a:solidFill>
-                  <a:srgbClr val="FFFFFF"/>
-                </a:solidFill>
-              </a:rPr>
-              <a:t>Crypto execution — planned</a:t>
+              <a:rPr sz="1100">
+                <a:solidFill>
+                  <a:srgbClr val="FFFFFF"/>
+                </a:solidFill>
+              </a:rPr>
+              <a:t>Business banking &amp; payout destination</a:t>
+            </a:r>
+          </a:p>
+        </p:txBody>
+      </p:sp>
+      <p:sp>
+        <p:nvSpPr>
+          <p:cNvPr id="11" name="TextBox 10"/>
+          <p:cNvSpPr txBox="1"/>
+          <p:nvPr/>
+        </p:nvSpPr>
+        <p:spPr>
+          <a:xfrm>
+            <a:off x="6858000" y="5596128"/>
+            <a:ext cx="4709160" cy="274320"/>
+          </a:xfrm>
+          <a:prstGeom prst="rect">
+            <a:avLst/>
+          </a:prstGeom>
+          <a:noFill/>
+        </p:spPr>
+        <p:txBody>
+          <a:bodyPr wrap="square">
+            <a:spAutoFit/>
+          </a:bodyPr>
+          <a:lstStyle/>
+          <a:p>
+            <a:pPr algn="ctr">
+              <a:spcAft>
+                <a:spcPts val="0"/>
+              </a:spcAft>
+            </a:pPr>
+            <a:r>
+              <a:rPr sz="950" b="0">
+                <a:solidFill>
+                  <a:srgbClr val="FFFFFF"/>
+                </a:solidFill>
+              </a:rPr>
+              <a:t>Partner names indicate service relationships, not endorsements.</a:t>
             </a:r>
           </a:p>
         </p:txBody>
@@ -15442,7 +15455,7 @@
         </p:nvSpPr>
         <p:spPr>
           <a:xfrm>
-            <a:off x="1097280" y="6016752"/>
+            <a:off x="1097280" y="5989320"/>
             <a:ext cx="9966960" cy="365760"/>
           </a:xfrm>
           <a:prstGeom prst="rect">
@@ -15462,9 +15475,9 @@
               </a:spcAft>
             </a:pPr>
             <a:r>
-              <a:rPr sz="1150" b="0">
-                <a:solidFill>
-                  <a:srgbClr val="E9E8FD"/>
+              <a:rPr sz="1200" b="0">
+                <a:solidFill>
+                  <a:srgbClr val="FFFFFF"/>
                 </a:solidFill>
               </a:rPr>
               <a:t>Proprietary workflow design + production financial infrastructure + partner approvals + a debt-first consumer brand.</a:t>
@@ -15474,45 +15487,7 @@
       </p:sp>
       <p:sp>
         <p:nvSpPr>
-          <p:cNvPr id="13" name="TextBox 12"/>
-          <p:cNvSpPr txBox="1"/>
-          <p:nvPr/>
-        </p:nvSpPr>
-        <p:spPr>
-          <a:xfrm>
-            <a:off x="6400800" y="6382512"/>
-            <a:ext cx="3931920" cy="274320"/>
-          </a:xfrm>
-          <a:prstGeom prst="rect">
-            <a:avLst/>
-          </a:prstGeom>
-          <a:noFill/>
-        </p:spPr>
-        <p:txBody>
-          <a:bodyPr wrap="square">
-            <a:spAutoFit/>
-          </a:bodyPr>
-          <a:lstStyle/>
-          <a:p>
-            <a:pPr algn="r">
-              <a:spcAft>
-                <a:spcPts val="0"/>
-              </a:spcAft>
-            </a:pPr>
-            <a:r>
-              <a:rPr sz="800" b="0">
-                <a:solidFill>
-                  <a:srgbClr val="E9E8FD"/>
-                </a:solidFill>
-              </a:rPr>
-              <a:t>Partner names indicate integrations, not endorsements.</a:t>
-            </a:r>
-          </a:p>
-        </p:txBody>
-      </p:sp>
-      <p:sp>
-        <p:nvSpPr>
-          <p:cNvPr id="14" name="Rectangle 13"/>
+          <p:cNvPr id="13" name="Rectangle 12"/>
           <p:cNvSpPr/>
           <p:nvPr/>
         </p:nvSpPr>
@@ -15556,7 +15531,7 @@
       </p:sp>
       <p:sp>
         <p:nvSpPr>
-          <p:cNvPr id="15" name="TextBox 14"/>
+          <p:cNvPr id="14" name="TextBox 13"/>
           <p:cNvSpPr txBox="1"/>
           <p:nvPr/>
         </p:nvSpPr>
@@ -15594,7 +15569,7 @@
       </p:sp>
       <p:sp>
         <p:nvSpPr>
-          <p:cNvPr id="16" name="TextBox 15"/>
+          <p:cNvPr id="15" name="TextBox 14"/>
           <p:cNvSpPr txBox="1"/>
           <p:nvPr/>
         </p:nvSpPr>
